--- a/presentation/FINAL_PRESENTATION.pptx
+++ b/presentation/FINAL_PRESENTATION.pptx
@@ -14182,7 +14182,7 @@
                           </a:solidFill>
                           <a:latin typeface="Segoe UI"/>
                         </a:rPr>
-                        <a:t>0.07</a:t>
+                        <a:t>0.06</a:t>
                       </a:r>
                     </a:p>
                   </a:txBody>
@@ -14276,7 +14276,7 @@
                           </a:solidFill>
                           <a:latin typeface="Segoe UI"/>
                         </a:rPr>
-                        <a:t>0.07</a:t>
+                        <a:t>0.08</a:t>
                       </a:r>
                     </a:p>
                   </a:txBody>
@@ -14370,7 +14370,7 @@
                           </a:solidFill>
                           <a:latin typeface="Segoe UI"/>
                         </a:rPr>
-                        <a:t>2.19</a:t>
+                        <a:t>2.27</a:t>
                       </a:r>
                     </a:p>
                   </a:txBody>
@@ -14464,7 +14464,7 @@
                           </a:solidFill>
                           <a:latin typeface="Segoe UI"/>
                         </a:rPr>
-                        <a:t>2.11</a:t>
+                        <a:t>2.44</a:t>
                       </a:r>
                     </a:p>
                   </a:txBody>
@@ -14558,7 +14558,7 @@
                           </a:solidFill>
                           <a:latin typeface="Segoe UI"/>
                         </a:rPr>
-                        <a:t>0.01</a:t>
+                        <a:t>0.02</a:t>
                       </a:r>
                     </a:p>
                   </a:txBody>
@@ -14746,7 +14746,7 @@
                           </a:solidFill>
                           <a:latin typeface="Segoe UI"/>
                         </a:rPr>
-                        <a:t>0.19</a:t>
+                        <a:t>0.22</a:t>
                       </a:r>
                     </a:p>
                   </a:txBody>
@@ -16443,7 +16443,7 @@
                 </a:solidFill>
                 <a:latin typeface="Segoe UI"/>
               </a:rPr>
-              <a:t>if the live bot is slow, show the recorded results in data/evaluation/multilingual_eval_results.json and the n8n execution view. Grounded LLM answers (20–70 s) are shown from recordings only.</a:t>
+              <a:t>if the live bot is slow, show the recorded results in data/evaluation/rc_20261018b_multilingual_results.json and the n8n execution view. Grounded LLM answers (20–70 s) are shown from recordings only.</a:t>
             </a:r>
           </a:p>
         </p:txBody>
@@ -16482,7 +16482,7 @@
                 </a:solidFill>
                 <a:latin typeface="Segoe UI"/>
               </a:rPr>
-              <a:t>Source: presentation/LIVE_DEMO_SCRIPT.md; latencies from report §7 and data/evaluation/multilingual_eval_results.json</a:t>
+              <a:t>Source: presentation/LIVE_DEMO_SCRIPT.md; latencies from report §7 and data/evaluation/rc_20261018b_multilingual_results.json</a:t>
             </a:r>
           </a:p>
         </p:txBody>
@@ -17524,8 +17524,8 @@
           <p:nvPr/>
         </p:nvGraphicFramePr>
         <p:xfrm>
-          <a:off x="457200" y="3931920"/>
-          <a:ext cx="11292840" cy="2084832"/>
+          <a:off x="457200" y="3840480"/>
+          <a:ext cx="11292840" cy="2240280"/>
         </p:xfrm>
         <a:graphic>
           <a:graphicData uri="http://schemas.openxmlformats.org/drawingml/2006/table">
@@ -17537,7 +17537,7 @@
                 <a:gridCol w="8229600"/>
                 <a:gridCol w="3063240"/>
               </a:tblGrid>
-              <a:tr h="347472">
+              <a:tr h="320040">
                 <a:tc>
                   <a:txBody>
                     <a:bodyPr/>
@@ -17585,7 +17585,7 @@
                   </a:tcPr>
                 </a:tc>
               </a:tr>
-              <a:tr h="347472">
+              <a:tr h="320040">
                 <a:tc>
                   <a:txBody>
                     <a:bodyPr/>
@@ -17633,7 +17633,7 @@
                   </a:tcPr>
                 </a:tc>
               </a:tr>
-              <a:tr h="347472">
+              <a:tr h="320040">
                 <a:tc>
                   <a:txBody>
                     <a:bodyPr/>
@@ -17681,7 +17681,7 @@
                   </a:tcPr>
                 </a:tc>
               </a:tr>
-              <a:tr h="347472">
+              <a:tr h="320040">
                 <a:tc>
                   <a:txBody>
                     <a:bodyPr/>
@@ -17695,7 +17695,7 @@
                           </a:solidFill>
                           <a:latin typeface="Segoe UI"/>
                         </a:rPr>
-                        <a:t>Multilingual parallel subset, 36 questions (candidate, today): 11 evidence, 4 correct refusals, 14 clarification questions, 7 failures</a:t>
+                        <a:t>Release candidate rc-20261018b, same 728 cases: all 17 replay metrics</a:t>
                       </a:r>
                     </a:p>
                   </a:txBody>
@@ -17718,7 +17718,7 @@
                           </a:solidFill>
                           <a:latin typeface="Segoe UI"/>
                         </a:rPr>
-                        <a:t>29/36 correct</a:t>
+                        <a:t>identical to final candidate</a:t>
                       </a:r>
                     </a:p>
                   </a:txBody>
@@ -17729,7 +17729,7 @@
                   </a:tcPr>
                 </a:tc>
               </a:tr>
-              <a:tr h="347472">
+              <a:tr h="320040">
                 <a:tc>
                   <a:txBody>
                     <a:bodyPr/>
@@ -17743,7 +17743,7 @@
                           </a:solidFill>
                           <a:latin typeface="Segoe UI"/>
                         </a:rPr>
-                        <a:t>Behaviour cases: clarification, follow-up, RNE codes, out-of-scope, injection</a:t>
+                        <a:t>Multilingual parallel subset, 36 questions (rc-20261018b): 18 evidence, 4 correct refusals, 14 clarification questions, 0 failures</a:t>
                       </a:r>
                     </a:p>
                   </a:txBody>
@@ -17766,7 +17766,7 @@
                           </a:solidFill>
                           <a:latin typeface="Segoe UI"/>
                         </a:rPr>
-                        <a:t>12/13 (carte grise fixed on overnight branch)</a:t>
+                        <a:t>0 failures (36/36 as designed)</a:t>
                       </a:r>
                     </a:p>
                   </a:txBody>
@@ -17777,7 +17777,7 @@
                   </a:tcPr>
                 </a:tc>
               </a:tr>
-              <a:tr h="347472">
+              <a:tr h="320040">
                 <a:tc>
                   <a:txBody>
                     <a:bodyPr/>
@@ -17791,13 +17791,61 @@
                           </a:solidFill>
                           <a:latin typeface="Segoe UI"/>
                         </a:rPr>
+                        <a:t>Behaviour cases: clarification, follow-up, RNE codes, out-of-scope, carte grise, injection</a:t>
+                      </a:r>
+                    </a:p>
+                  </a:txBody>
+                  <a:tcPr marL="54864" marR="54864" marT="18288" marB="18288" anchor="ctr">
+                    <a:solidFill>
+                      <a:srgbClr val="FFFFFF"/>
+                    </a:solidFill>
+                  </a:tcPr>
+                </a:tc>
+                <a:tc>
+                  <a:txBody>
+                    <a:bodyPr/>
+                    <a:lstStyle/>
+                    <a:p>
+                      <a:pPr algn="ctr"/>
+                      <a:r>
+                        <a:rPr sz="1100" b="0" i="0">
+                          <a:solidFill>
+                            <a:srgbClr val="4A5560"/>
+                          </a:solidFill>
+                          <a:latin typeface="Segoe UI"/>
+                        </a:rPr>
+                        <a:t>13/13</a:t>
+                      </a:r>
+                    </a:p>
+                  </a:txBody>
+                  <a:tcPr marL="54864" marR="54864" marT="18288" marB="18288" anchor="ctr">
+                    <a:solidFill>
+                      <a:srgbClr val="FFFFFF"/>
+                    </a:solidFill>
+                  </a:tcPr>
+                </a:tc>
+              </a:tr>
+              <a:tr h="320040">
+                <a:tc>
+                  <a:txBody>
+                    <a:bodyPr/>
+                    <a:lstStyle/>
+                    <a:p>
+                      <a:pPr algn="l"/>
+                      <a:r>
+                        <a:rPr sz="1100" b="0" i="0">
+                          <a:solidFill>
+                            <a:srgbClr val="4A5560"/>
+                          </a:solidFill>
+                          <a:latin typeface="Segoe UI"/>
+                        </a:rPr>
                         <a:t>Unit and regression tests (no services needed)</a:t>
                       </a:r>
                     </a:p>
                   </a:txBody>
                   <a:tcPr marL="54864" marR="54864" marT="18288" marB="18288" anchor="ctr">
                     <a:solidFill>
-                      <a:srgbClr val="FFFFFF"/>
+                      <a:srgbClr val="EEF2F6"/>
                     </a:solidFill>
                   </a:tcPr>
                 </a:tc>
@@ -17814,13 +17862,13 @@
                           </a:solidFill>
                           <a:latin typeface="Segoe UI"/>
                         </a:rPr>
-                        <a:t>1069 passed, 5 skipped (overnight branch); 1059 passed on be787ca</a:t>
-                      </a:r>
-                    </a:p>
-                  </a:txBody>
-                  <a:tcPr marL="54864" marR="54864" marT="18288" marB="18288" anchor="ctr">
-                    <a:solidFill>
-                      <a:srgbClr val="FFFFFF"/>
+                        <a:t>1097 passed, 5 skipped; integration 37/37 on the rc stack</a:t>
+                      </a:r>
+                    </a:p>
+                  </a:txBody>
+                  <a:tcPr marL="54864" marR="54864" marT="18288" marB="18288" anchor="ctr">
+                    <a:solidFill>
+                      <a:srgbClr val="EEF2F6"/>
                     </a:solidFill>
                   </a:tcPr>
                 </a:tc>
@@ -17863,7 +17911,7 @@
                 </a:solidFill>
                 <a:latin typeface="Segoe UI"/>
               </a:rPr>
-              <a:t>Source: report/tables/final_regression.tex; data/evaluation/multilingual_eval_results.json (scripts/multilingual_eval.py); pytest -m 'not integration'</a:t>
+              <a:t>Source: report/tables/final_regression.tex; rc_20261018b_replay_results.jsonl (scripts/score_replay.py); rc_20261018b_multilingual_results.json; pytest</a:t>
             </a:r>
           </a:p>
         </p:txBody>
